--- a/materials/Разработка веб-приложения для просмотра интересных мест в городах.pptx
+++ b/materials/Разработка веб-приложения для просмотра интересных мест в городах.pptx
@@ -112,6 +112,11 @@
       </a:defRPr>
     </a:lvl9pPr>
   </p:defaultTextStyle>
+  <p:extLst>
+    <p:ext uri="{EFAFB233-063F-42B5-8137-9DF3F51BA10A}">
+      <p15:sldGuideLst xmlns:p15="http://schemas.microsoft.com/office/powerpoint/2012/main"/>
+    </p:ext>
+  </p:extLst>
 </p:presentation>
 </file>
 
@@ -262,7 +267,7 @@
           <a:p>
             <a:fld id="{27A43D05-E72E-4D05-8A21-F6B6C75AF8A2}" type="datetimeFigureOut">
               <a:rPr lang="ru-RU" smtClean="0"/>
-              <a:t>17.05.2026</a:t>
+              <a:t>18.05.2026</a:t>
             </a:fld>
             <a:endParaRPr lang="ru-RU"/>
           </a:p>
@@ -460,7 +465,7 @@
           <a:p>
             <a:fld id="{27A43D05-E72E-4D05-8A21-F6B6C75AF8A2}" type="datetimeFigureOut">
               <a:rPr lang="ru-RU" smtClean="0"/>
-              <a:t>17.05.2026</a:t>
+              <a:t>18.05.2026</a:t>
             </a:fld>
             <a:endParaRPr lang="ru-RU"/>
           </a:p>
@@ -668,7 +673,7 @@
           <a:p>
             <a:fld id="{27A43D05-E72E-4D05-8A21-F6B6C75AF8A2}" type="datetimeFigureOut">
               <a:rPr lang="ru-RU" smtClean="0"/>
-              <a:t>17.05.2026</a:t>
+              <a:t>18.05.2026</a:t>
             </a:fld>
             <a:endParaRPr lang="ru-RU"/>
           </a:p>
@@ -866,7 +871,7 @@
           <a:p>
             <a:fld id="{27A43D05-E72E-4D05-8A21-F6B6C75AF8A2}" type="datetimeFigureOut">
               <a:rPr lang="ru-RU" smtClean="0"/>
-              <a:t>17.05.2026</a:t>
+              <a:t>18.05.2026</a:t>
             </a:fld>
             <a:endParaRPr lang="ru-RU"/>
           </a:p>
@@ -1141,7 +1146,7 @@
           <a:p>
             <a:fld id="{27A43D05-E72E-4D05-8A21-F6B6C75AF8A2}" type="datetimeFigureOut">
               <a:rPr lang="ru-RU" smtClean="0"/>
-              <a:t>17.05.2026</a:t>
+              <a:t>18.05.2026</a:t>
             </a:fld>
             <a:endParaRPr lang="ru-RU"/>
           </a:p>
@@ -1406,7 +1411,7 @@
           <a:p>
             <a:fld id="{27A43D05-E72E-4D05-8A21-F6B6C75AF8A2}" type="datetimeFigureOut">
               <a:rPr lang="ru-RU" smtClean="0"/>
-              <a:t>17.05.2026</a:t>
+              <a:t>18.05.2026</a:t>
             </a:fld>
             <a:endParaRPr lang="ru-RU"/>
           </a:p>
@@ -1818,7 +1823,7 @@
           <a:p>
             <a:fld id="{27A43D05-E72E-4D05-8A21-F6B6C75AF8A2}" type="datetimeFigureOut">
               <a:rPr lang="ru-RU" smtClean="0"/>
-              <a:t>17.05.2026</a:t>
+              <a:t>18.05.2026</a:t>
             </a:fld>
             <a:endParaRPr lang="ru-RU"/>
           </a:p>
@@ -1959,7 +1964,7 @@
           <a:p>
             <a:fld id="{27A43D05-E72E-4D05-8A21-F6B6C75AF8A2}" type="datetimeFigureOut">
               <a:rPr lang="ru-RU" smtClean="0"/>
-              <a:t>17.05.2026</a:t>
+              <a:t>18.05.2026</a:t>
             </a:fld>
             <a:endParaRPr lang="ru-RU"/>
           </a:p>
@@ -2072,7 +2077,7 @@
           <a:p>
             <a:fld id="{27A43D05-E72E-4D05-8A21-F6B6C75AF8A2}" type="datetimeFigureOut">
               <a:rPr lang="ru-RU" smtClean="0"/>
-              <a:t>17.05.2026</a:t>
+              <a:t>18.05.2026</a:t>
             </a:fld>
             <a:endParaRPr lang="ru-RU"/>
           </a:p>
@@ -2383,7 +2388,7 @@
           <a:p>
             <a:fld id="{27A43D05-E72E-4D05-8A21-F6B6C75AF8A2}" type="datetimeFigureOut">
               <a:rPr lang="ru-RU" smtClean="0"/>
-              <a:t>17.05.2026</a:t>
+              <a:t>18.05.2026</a:t>
             </a:fld>
             <a:endParaRPr lang="ru-RU"/>
           </a:p>
@@ -2671,7 +2676,7 @@
           <a:p>
             <a:fld id="{27A43D05-E72E-4D05-8A21-F6B6C75AF8A2}" type="datetimeFigureOut">
               <a:rPr lang="ru-RU" smtClean="0"/>
-              <a:t>17.05.2026</a:t>
+              <a:t>18.05.2026</a:t>
             </a:fld>
             <a:endParaRPr lang="ru-RU"/>
           </a:p>
@@ -2912,7 +2917,7 @@
           <a:p>
             <a:fld id="{27A43D05-E72E-4D05-8A21-F6B6C75AF8A2}" type="datetimeFigureOut">
               <a:rPr lang="ru-RU" smtClean="0"/>
-              <a:t>17.05.2026</a:t>
+              <a:t>18.05.2026</a:t>
             </a:fld>
             <a:endParaRPr lang="ru-RU"/>
           </a:p>
@@ -3400,6 +3405,14 @@
               <a:rPr lang="ru-RU" dirty="0"/>
               <a:t>Руководитель: Приступа Инна</a:t>
             </a:r>
+            <a:r>
+              <a:rPr lang="en-US" dirty="0"/>
+              <a:t> </a:t>
+            </a:r>
+            <a:r>
+              <a:rPr lang="ru-RU" dirty="0"/>
+              <a:t>Григорьевна</a:t>
+            </a:r>
           </a:p>
           <a:p>
             <a:r>
@@ -3585,8 +3598,13 @@
           <a:p>
             <a:r>
               <a:rPr lang="ru-RU" dirty="0"/>
-              <a:t>Структура проекта</a:t>
-            </a:r>
+              <a:t>Структура проекта и </a:t>
+            </a:r>
+            <a:r>
+              <a:rPr lang="ru-RU" dirty="0" err="1"/>
+              <a:t>бд</a:t>
+            </a:r>
+            <a:endParaRPr lang="ru-RU" dirty="0"/>
           </a:p>
         </p:txBody>
       </p:sp>
@@ -3608,87 +3626,87 @@
         </p:nvSpPr>
         <p:spPr>
           <a:xfrm>
-            <a:off x="5771535" y="1847947"/>
-            <a:ext cx="5171767" cy="4351338"/>
+            <a:off x="4645742" y="1548181"/>
+            <a:ext cx="4758813" cy="4351338"/>
           </a:xfrm>
         </p:spPr>
         <p:txBody>
           <a:bodyPr>
-            <a:normAutofit fontScale="85000" lnSpcReduction="20000"/>
+            <a:normAutofit lnSpcReduction="10000"/>
           </a:bodyPr>
           <a:lstStyle/>
           <a:p>
             <a:r>
-              <a:rPr lang="en-US" dirty="0"/>
+              <a:rPr lang="en-US" sz="2200" dirty="0"/>
               <a:t>Blueprints – </a:t>
             </a:r>
             <a:r>
-              <a:rPr lang="ru-RU" dirty="0"/>
+              <a:rPr lang="ru-RU" sz="2200" dirty="0"/>
               <a:t>реализация страниц</a:t>
             </a:r>
           </a:p>
           <a:p>
             <a:r>
-              <a:rPr lang="en-US" dirty="0"/>
+              <a:rPr lang="en-US" sz="2200" dirty="0"/>
               <a:t>Data – </a:t>
             </a:r>
             <a:r>
-              <a:rPr lang="ru-RU" dirty="0"/>
+              <a:rPr lang="ru-RU" sz="2200" dirty="0"/>
               <a:t>дата классы для </a:t>
             </a:r>
             <a:r>
-              <a:rPr lang="ru-RU" dirty="0" err="1"/>
+              <a:rPr lang="ru-RU" sz="2200" dirty="0" err="1"/>
               <a:t>бд</a:t>
             </a:r>
-            <a:endParaRPr lang="ru-RU" dirty="0"/>
-          </a:p>
-          <a:p>
-            <a:r>
-              <a:rPr lang="en-US" dirty="0"/>
+            <a:endParaRPr lang="ru-RU" sz="2200" dirty="0"/>
+          </a:p>
+          <a:p>
+            <a:r>
+              <a:rPr lang="en-US" sz="2200" dirty="0"/>
               <a:t>Db – </a:t>
             </a:r>
             <a:r>
-              <a:rPr lang="ru-RU" dirty="0"/>
+              <a:rPr lang="ru-RU" sz="2200" dirty="0"/>
               <a:t>база данных</a:t>
             </a:r>
           </a:p>
           <a:p>
             <a:r>
-              <a:rPr lang="en-US" dirty="0"/>
+              <a:rPr lang="en-US" sz="2200" dirty="0"/>
               <a:t>Forms – </a:t>
             </a:r>
             <a:r>
-              <a:rPr lang="ru-RU" dirty="0"/>
+              <a:rPr lang="ru-RU" sz="2200" dirty="0"/>
               <a:t>формы для входа и регистрации, добавления места, редакции места и редакции профиля</a:t>
             </a:r>
           </a:p>
           <a:p>
             <a:r>
-              <a:rPr lang="en-US" dirty="0"/>
+              <a:rPr lang="en-US" sz="2200" dirty="0"/>
               <a:t>Materials – </a:t>
             </a:r>
             <a:r>
-              <a:rPr lang="ru-RU" dirty="0"/>
+              <a:rPr lang="ru-RU" sz="2200" dirty="0"/>
               <a:t>спецификация и презентация</a:t>
             </a:r>
           </a:p>
           <a:p>
             <a:r>
-              <a:rPr lang="en-US" dirty="0"/>
+              <a:rPr lang="en-US" sz="2200" dirty="0"/>
               <a:t>Static – </a:t>
             </a:r>
             <a:r>
-              <a:rPr lang="ru-RU" dirty="0"/>
+              <a:rPr lang="ru-RU" sz="2200" dirty="0"/>
               <a:t>хранение фотографий мест</a:t>
             </a:r>
           </a:p>
           <a:p>
             <a:r>
-              <a:rPr lang="en-US" dirty="0"/>
+              <a:rPr lang="en-US" sz="2200" dirty="0"/>
               <a:t>Templates – HTML – </a:t>
             </a:r>
             <a:r>
-              <a:rPr lang="ru-RU" dirty="0"/>
+              <a:rPr lang="ru-RU" sz="2200" dirty="0"/>
               <a:t>разметка страниц</a:t>
             </a:r>
           </a:p>
@@ -3722,8 +3740,38 @@
         </p:blipFill>
         <p:spPr>
           <a:xfrm>
-            <a:off x="770591" y="1658733"/>
+            <a:off x="234733" y="1445117"/>
             <a:ext cx="4175036" cy="3967765"/>
+          </a:xfrm>
+          <a:prstGeom prst="rect">
+            <a:avLst/>
+          </a:prstGeom>
+        </p:spPr>
+      </p:pic>
+      <p:pic>
+        <p:nvPicPr>
+          <p:cNvPr id="4" name="Рисунок 3">
+            <a:extLst>
+              <a:ext uri="{FF2B5EF4-FFF2-40B4-BE49-F238E27FC236}">
+                <a16:creationId xmlns:a16="http://schemas.microsoft.com/office/drawing/2014/main" id="{5226C9BB-021F-4D82-84C6-BFE9EC6FFB0A}"/>
+              </a:ext>
+            </a:extLst>
+          </p:cNvPr>
+          <p:cNvPicPr>
+            <a:picLocks noChangeAspect="1"/>
+          </p:cNvPicPr>
+          <p:nvPr/>
+        </p:nvPicPr>
+        <p:blipFill>
+          <a:blip r:embed="rId3"/>
+          <a:stretch>
+            <a:fillRect/>
+          </a:stretch>
+        </p:blipFill>
+        <p:spPr>
+          <a:xfrm>
+            <a:off x="9312291" y="1490294"/>
+            <a:ext cx="2133774" cy="4122983"/>
           </a:xfrm>
           <a:prstGeom prst="rect">
             <a:avLst/>
